--- a/Invasive_Mechanical_Ventilation_restyled.pptx
+++ b/Invasive_Mechanical_Ventilation_restyled.pptx
@@ -5970,10 +5970,10 @@
       </p:grpSpPr>
       <p:sp>
         <p:nvSpPr>
-          <p:cNvPr id="25" name="Rectangle 24">
+          <p:cNvPr id="30" name="Rectangle 29">
             <a:extLst>
               <a:ext uri="{FF2B5EF4-FFF2-40B4-BE49-F238E27FC236}">
-                <a16:creationId xmlns:a16="http://schemas.microsoft.com/office/drawing/2014/main" id="{42A4FC2C-047E-45A5-965D-8E1E3BF09BC6}"/>
+                <a16:creationId xmlns:a16="http://schemas.microsoft.com/office/drawing/2014/main" id="{F3060C83-F051-4F0E-ABAD-AA0DFC48B218}"/>
               </a:ext>
               <a:ext uri="{C183D7F6-B498-43B3-948B-1728B52AA6E4}">
                 <adec:decorative xmlns:adec="http://schemas.microsoft.com/office/drawing/2017/decorative" val="1"/>
@@ -5991,15 +5991,17 @@
             </p:extLst>
           </p:nvPr>
         </p:nvSpPr>
-        <p:spPr bwMode="white">
-          <a:xfrm>
-            <a:off x="1143" y="0"/>
-            <a:ext cx="9141714" cy="5143500"/>
-          </a:xfrm>
-          <a:prstGeom prst="rect">
-            <a:avLst/>
-          </a:prstGeom>
-          <a:noFill/>
+        <p:spPr>
+          <a:xfrm>
+            <a:off x="0" y="0"/>
+            <a:ext cx="9144000" cy="5143500"/>
+          </a:xfrm>
+          <a:prstGeom prst="rect">
+            <a:avLst/>
+          </a:prstGeom>
+          <a:solidFill>
+            <a:schemeClr val="bg1"/>
+          </a:solidFill>
           <a:ln>
             <a:noFill/>
           </a:ln>
@@ -6022,113 +6024,440 @@
         </p:style>
         <p:txBody>
           <a:bodyPr rtlCol="0" anchor="ctr"/>
-          <a:lstStyle>
-            <a:defPPr>
-              <a:defRPr lang="en-US"/>
-            </a:defPPr>
-            <a:lvl1pPr marL="0" algn="l" defTabSz="914400" rtl="0" eaLnBrk="1" latinLnBrk="0" hangingPunct="1">
-              <a:defRPr sz="1800" kern="1200">
-                <a:solidFill>
-                  <a:schemeClr val="lt1"/>
-                </a:solidFill>
-                <a:latin typeface="+mn-lt"/>
-                <a:ea typeface="+mn-ea"/>
-                <a:cs typeface="+mn-cs"/>
-              </a:defRPr>
-            </a:lvl1pPr>
-            <a:lvl2pPr marL="457200" algn="l" defTabSz="914400" rtl="0" eaLnBrk="1" latinLnBrk="0" hangingPunct="1">
-              <a:defRPr sz="1800" kern="1200">
-                <a:solidFill>
-                  <a:schemeClr val="lt1"/>
-                </a:solidFill>
-                <a:latin typeface="+mn-lt"/>
-                <a:ea typeface="+mn-ea"/>
-                <a:cs typeface="+mn-cs"/>
-              </a:defRPr>
-            </a:lvl2pPr>
-            <a:lvl3pPr marL="914400" algn="l" defTabSz="914400" rtl="0" eaLnBrk="1" latinLnBrk="0" hangingPunct="1">
-              <a:defRPr sz="1800" kern="1200">
-                <a:solidFill>
-                  <a:schemeClr val="lt1"/>
-                </a:solidFill>
-                <a:latin typeface="+mn-lt"/>
-                <a:ea typeface="+mn-ea"/>
-                <a:cs typeface="+mn-cs"/>
-              </a:defRPr>
-            </a:lvl3pPr>
-            <a:lvl4pPr marL="1371600" algn="l" defTabSz="914400" rtl="0" eaLnBrk="1" latinLnBrk="0" hangingPunct="1">
-              <a:defRPr sz="1800" kern="1200">
-                <a:solidFill>
-                  <a:schemeClr val="lt1"/>
-                </a:solidFill>
-                <a:latin typeface="+mn-lt"/>
-                <a:ea typeface="+mn-ea"/>
-                <a:cs typeface="+mn-cs"/>
-              </a:defRPr>
-            </a:lvl4pPr>
-            <a:lvl5pPr marL="1828800" algn="l" defTabSz="914400" rtl="0" eaLnBrk="1" latinLnBrk="0" hangingPunct="1">
-              <a:defRPr sz="1800" kern="1200">
-                <a:solidFill>
-                  <a:schemeClr val="lt1"/>
-                </a:solidFill>
-                <a:latin typeface="+mn-lt"/>
-                <a:ea typeface="+mn-ea"/>
-                <a:cs typeface="+mn-cs"/>
-              </a:defRPr>
-            </a:lvl5pPr>
-            <a:lvl6pPr marL="2286000" algn="l" defTabSz="914400" rtl="0" eaLnBrk="1" latinLnBrk="0" hangingPunct="1">
-              <a:defRPr sz="1800" kern="1200">
-                <a:solidFill>
-                  <a:schemeClr val="lt1"/>
-                </a:solidFill>
-                <a:latin typeface="+mn-lt"/>
-                <a:ea typeface="+mn-ea"/>
-                <a:cs typeface="+mn-cs"/>
-              </a:defRPr>
-            </a:lvl6pPr>
-            <a:lvl7pPr marL="2743200" algn="l" defTabSz="914400" rtl="0" eaLnBrk="1" latinLnBrk="0" hangingPunct="1">
-              <a:defRPr sz="1800" kern="1200">
-                <a:solidFill>
-                  <a:schemeClr val="lt1"/>
-                </a:solidFill>
-                <a:latin typeface="+mn-lt"/>
-                <a:ea typeface="+mn-ea"/>
-                <a:cs typeface="+mn-cs"/>
-              </a:defRPr>
-            </a:lvl7pPr>
-            <a:lvl8pPr marL="3200400" algn="l" defTabSz="914400" rtl="0" eaLnBrk="1" latinLnBrk="0" hangingPunct="1">
-              <a:defRPr sz="1800" kern="1200">
-                <a:solidFill>
-                  <a:schemeClr val="lt1"/>
-                </a:solidFill>
-                <a:latin typeface="+mn-lt"/>
-                <a:ea typeface="+mn-ea"/>
-                <a:cs typeface="+mn-cs"/>
-              </a:defRPr>
-            </a:lvl8pPr>
-            <a:lvl9pPr marL="3657600" algn="l" defTabSz="914400" rtl="0" eaLnBrk="1" latinLnBrk="0" hangingPunct="1">
-              <a:defRPr sz="1800" kern="1200">
-                <a:solidFill>
-                  <a:schemeClr val="lt1"/>
-                </a:solidFill>
-                <a:latin typeface="+mn-lt"/>
-                <a:ea typeface="+mn-ea"/>
-                <a:cs typeface="+mn-cs"/>
-              </a:defRPr>
-            </a:lvl9pPr>
-          </a:lstStyle>
+          <a:lstStyle/>
+          <a:p>
+            <a:pPr algn="ctr"/>
+            <a:endParaRPr lang="en-US" dirty="0"/>
+          </a:p>
+        </p:txBody>
+      </p:sp>
+      <p:sp>
+        <p:nvSpPr>
+          <p:cNvPr id="32" name="Freeform: Shape 31">
+            <a:extLst>
+              <a:ext uri="{FF2B5EF4-FFF2-40B4-BE49-F238E27FC236}">
+                <a16:creationId xmlns:a16="http://schemas.microsoft.com/office/drawing/2014/main" id="{83C98ABE-055B-441F-B07E-44F97F083C39}"/>
+              </a:ext>
+              <a:ext uri="{C183D7F6-B498-43B3-948B-1728B52AA6E4}">
+                <adec:decorative xmlns:adec="http://schemas.microsoft.com/office/drawing/2017/decorative" val="1"/>
+              </a:ext>
+            </a:extLst>
+          </p:cNvPr>
+          <p:cNvSpPr>
+            <a:spLocks noGrp="1" noRot="1" noChangeAspect="1" noMove="1" noResize="1" noEditPoints="1" noAdjustHandles="1" noChangeArrowheads="1" noChangeShapeType="1" noTextEdit="1"/>
+          </p:cNvSpPr>
+          <p:nvPr>
+            <p:extLst>
+              <p:ext uri="{386F3935-93C4-4BCD-93E2-E3B085C9AB24}">
+                <p16:designElem xmlns:p16="http://schemas.microsoft.com/office/powerpoint/2015/main" val="1"/>
+              </p:ext>
+            </p:extLst>
+          </p:nvPr>
+        </p:nvSpPr>
+        <p:spPr>
+          <a:xfrm rot="18900000" flipH="1">
+            <a:off x="-282117" y="-190252"/>
+            <a:ext cx="1370728" cy="1032741"/>
+          </a:xfrm>
+          <a:custGeom>
+            <a:avLst/>
+            <a:gdLst>
+              <a:gd name="connsiteX0" fmla="*/ 0 w 1827638"/>
+              <a:gd name="connsiteY0" fmla="*/ 987379 h 1376989"/>
+              <a:gd name="connsiteX1" fmla="*/ 987379 w 1827638"/>
+              <a:gd name="connsiteY1" fmla="*/ 0 h 1376989"/>
+              <a:gd name="connsiteX2" fmla="*/ 1827638 w 1827638"/>
+              <a:gd name="connsiteY2" fmla="*/ 840260 h 1376989"/>
+              <a:gd name="connsiteX3" fmla="*/ 1827638 w 1827638"/>
+              <a:gd name="connsiteY3" fmla="*/ 1376989 h 1376989"/>
+              <a:gd name="connsiteX4" fmla="*/ 0 w 1827638"/>
+              <a:gd name="connsiteY4" fmla="*/ 1376989 h 1376989"/>
+            </a:gdLst>
+            <a:ahLst/>
+            <a:cxnLst>
+              <a:cxn ang="0">
+                <a:pos x="connsiteX0" y="connsiteY0"/>
+              </a:cxn>
+              <a:cxn ang="0">
+                <a:pos x="connsiteX1" y="connsiteY1"/>
+              </a:cxn>
+              <a:cxn ang="0">
+                <a:pos x="connsiteX2" y="connsiteY2"/>
+              </a:cxn>
+              <a:cxn ang="0">
+                <a:pos x="connsiteX3" y="connsiteY3"/>
+              </a:cxn>
+              <a:cxn ang="0">
+                <a:pos x="connsiteX4" y="connsiteY4"/>
+              </a:cxn>
+            </a:cxnLst>
+            <a:rect l="l" t="t" r="r" b="b"/>
+            <a:pathLst>
+              <a:path w="1827638" h="1376989">
+                <a:moveTo>
+                  <a:pt x="0" y="987379"/>
+                </a:moveTo>
+                <a:lnTo>
+                  <a:pt x="987379" y="0"/>
+                </a:lnTo>
+                <a:lnTo>
+                  <a:pt x="1827638" y="840260"/>
+                </a:lnTo>
+                <a:lnTo>
+                  <a:pt x="1827638" y="1376989"/>
+                </a:lnTo>
+                <a:lnTo>
+                  <a:pt x="0" y="1376989"/>
+                </a:lnTo>
+                <a:close/>
+              </a:path>
+            </a:pathLst>
+          </a:custGeom>
+          <a:solidFill>
+            <a:schemeClr val="accent1">
+              <a:alpha val="30000"/>
+            </a:schemeClr>
+          </a:solidFill>
+          <a:ln>
+            <a:noFill/>
+          </a:ln>
+        </p:spPr>
+        <p:style>
+          <a:lnRef idx="2">
+            <a:schemeClr val="accent1">
+              <a:shade val="50000"/>
+            </a:schemeClr>
+          </a:lnRef>
+          <a:fillRef idx="1">
+            <a:schemeClr val="accent1"/>
+          </a:fillRef>
+          <a:effectRef idx="0">
+            <a:schemeClr val="accent1"/>
+          </a:effectRef>
+          <a:fontRef idx="minor">
+            <a:schemeClr val="lt1"/>
+          </a:fontRef>
+        </p:style>
+        <p:txBody>
+          <a:bodyPr rtlCol="0" anchor="ctr"/>
+          <a:lstStyle/>
+          <a:p>
+            <a:pPr algn="ctr"/>
+            <a:endParaRPr lang="en-US" dirty="0"/>
+          </a:p>
+        </p:txBody>
+      </p:sp>
+      <p:sp>
+        <p:nvSpPr>
+          <p:cNvPr id="34" name="Rectangle 33">
+            <a:extLst>
+              <a:ext uri="{FF2B5EF4-FFF2-40B4-BE49-F238E27FC236}">
+                <a16:creationId xmlns:a16="http://schemas.microsoft.com/office/drawing/2014/main" id="{29FDB030-9B49-4CED-8CCD-4D99382388AC}"/>
+              </a:ext>
+              <a:ext uri="{C183D7F6-B498-43B3-948B-1728B52AA6E4}">
+                <adec:decorative xmlns:adec="http://schemas.microsoft.com/office/drawing/2017/decorative" val="1"/>
+              </a:ext>
+            </a:extLst>
+          </p:cNvPr>
+          <p:cNvSpPr>
+            <a:spLocks noGrp="1" noRot="1" noChangeAspect="1" noMove="1" noResize="1" noEditPoints="1" noAdjustHandles="1" noChangeArrowheads="1" noChangeShapeType="1" noTextEdit="1"/>
+          </p:cNvSpPr>
+          <p:nvPr>
+            <p:extLst>
+              <p:ext uri="{386F3935-93C4-4BCD-93E2-E3B085C9AB24}">
+                <p16:designElem xmlns:p16="http://schemas.microsoft.com/office/powerpoint/2015/main" val="1"/>
+              </p:ext>
+            </p:extLst>
+          </p:nvPr>
+        </p:nvSpPr>
+        <p:spPr>
+          <a:xfrm rot="18900000" flipH="1">
+            <a:off x="668730" y="316609"/>
+            <a:ext cx="484026" cy="484026"/>
+          </a:xfrm>
+          <a:prstGeom prst="rect">
+            <a:avLst/>
+          </a:prstGeom>
+          <a:solidFill>
+            <a:schemeClr val="accent1">
+              <a:alpha val="30000"/>
+            </a:schemeClr>
+          </a:solidFill>
+          <a:ln>
+            <a:noFill/>
+          </a:ln>
+        </p:spPr>
+        <p:style>
+          <a:lnRef idx="2">
+            <a:schemeClr val="accent1">
+              <a:shade val="50000"/>
+            </a:schemeClr>
+          </a:lnRef>
+          <a:fillRef idx="1">
+            <a:schemeClr val="accent1"/>
+          </a:fillRef>
+          <a:effectRef idx="0">
+            <a:schemeClr val="accent1"/>
+          </a:effectRef>
+          <a:fontRef idx="minor">
+            <a:schemeClr val="lt1"/>
+          </a:fontRef>
+        </p:style>
+        <p:txBody>
+          <a:bodyPr rtlCol="0" anchor="ctr"/>
+          <a:lstStyle/>
           <a:p>
             <a:pPr algn="ctr"/>
             <a:endParaRPr lang="en-US"/>
           </a:p>
         </p:txBody>
       </p:sp>
+      <p:sp>
+        <p:nvSpPr>
+          <p:cNvPr id="36" name="Rectangle 35">
+            <a:extLst>
+              <a:ext uri="{FF2B5EF4-FFF2-40B4-BE49-F238E27FC236}">
+                <a16:creationId xmlns:a16="http://schemas.microsoft.com/office/drawing/2014/main" id="{3783CA14-24A1-485C-8B30-D6A5D87987AD}"/>
+              </a:ext>
+              <a:ext uri="{C183D7F6-B498-43B3-948B-1728B52AA6E4}">
+                <adec:decorative xmlns:adec="http://schemas.microsoft.com/office/drawing/2017/decorative" val="1"/>
+              </a:ext>
+            </a:extLst>
+          </p:cNvPr>
+          <p:cNvSpPr>
+            <a:spLocks noGrp="1" noRot="1" noChangeAspect="1" noMove="1" noResize="1" noEditPoints="1" noAdjustHandles="1" noChangeArrowheads="1" noChangeShapeType="1" noTextEdit="1"/>
+          </p:cNvSpPr>
+          <p:nvPr>
+            <p:extLst>
+              <p:ext uri="{386F3935-93C4-4BCD-93E2-E3B085C9AB24}">
+                <p16:designElem xmlns:p16="http://schemas.microsoft.com/office/powerpoint/2015/main" val="1"/>
+              </p:ext>
+            </p:extLst>
+          </p:nvPr>
+        </p:nvSpPr>
+        <p:spPr>
+          <a:xfrm rot="18900000" flipH="1">
+            <a:off x="7532611" y="491355"/>
+            <a:ext cx="515604" cy="515604"/>
+          </a:xfrm>
+          <a:prstGeom prst="rect">
+            <a:avLst/>
+          </a:prstGeom>
+          <a:solidFill>
+            <a:schemeClr val="accent4">
+              <a:alpha val="30000"/>
+            </a:schemeClr>
+          </a:solidFill>
+          <a:ln>
+            <a:noFill/>
+          </a:ln>
+        </p:spPr>
+        <p:style>
+          <a:lnRef idx="2">
+            <a:schemeClr val="accent1">
+              <a:shade val="50000"/>
+            </a:schemeClr>
+          </a:lnRef>
+          <a:fillRef idx="1">
+            <a:schemeClr val="accent1"/>
+          </a:fillRef>
+          <a:effectRef idx="0">
+            <a:schemeClr val="accent1"/>
+          </a:effectRef>
+          <a:fontRef idx="minor">
+            <a:schemeClr val="lt1"/>
+          </a:fontRef>
+        </p:style>
+        <p:txBody>
+          <a:bodyPr rtlCol="0" anchor="ctr"/>
+          <a:lstStyle/>
+          <a:p>
+            <a:pPr algn="ctr"/>
+            <a:endParaRPr lang="en-US"/>
+          </a:p>
+        </p:txBody>
+      </p:sp>
+      <p:sp>
+        <p:nvSpPr>
+          <p:cNvPr id="38" name="Freeform: Shape 37">
+            <a:extLst>
+              <a:ext uri="{FF2B5EF4-FFF2-40B4-BE49-F238E27FC236}">
+                <a16:creationId xmlns:a16="http://schemas.microsoft.com/office/drawing/2014/main" id="{9A97C86A-04D6-40F7-AE84-31AB43E6A846}"/>
+              </a:ext>
+              <a:ext uri="{C183D7F6-B498-43B3-948B-1728B52AA6E4}">
+                <adec:decorative xmlns:adec="http://schemas.microsoft.com/office/drawing/2017/decorative" val="1"/>
+              </a:ext>
+            </a:extLst>
+          </p:cNvPr>
+          <p:cNvSpPr>
+            <a:spLocks noGrp="1" noRot="1" noChangeAspect="1" noMove="1" noResize="1" noEditPoints="1" noAdjustHandles="1" noChangeArrowheads="1" noChangeShapeType="1" noTextEdit="1"/>
+          </p:cNvSpPr>
+          <p:nvPr>
+            <p:extLst>
+              <p:ext uri="{386F3935-93C4-4BCD-93E2-E3B085C9AB24}">
+                <p16:designElem xmlns:p16="http://schemas.microsoft.com/office/powerpoint/2015/main" val="1"/>
+              </p:ext>
+            </p:extLst>
+          </p:nvPr>
+        </p:nvSpPr>
+        <p:spPr>
+          <a:xfrm rot="10800000" flipH="1">
+            <a:off x="7017482" y="0"/>
+            <a:ext cx="2126518" cy="1110627"/>
+          </a:xfrm>
+          <a:custGeom>
+            <a:avLst/>
+            <a:gdLst>
+              <a:gd name="connsiteX0" fmla="*/ 2835357 w 2835357"/>
+              <a:gd name="connsiteY0" fmla="*/ 1480837 h 1480837"/>
+              <a:gd name="connsiteX1" fmla="*/ 0 w 2835357"/>
+              <a:gd name="connsiteY1" fmla="*/ 1480837 h 1480837"/>
+              <a:gd name="connsiteX2" fmla="*/ 1552727 w 2835357"/>
+              <a:gd name="connsiteY2" fmla="*/ 0 h 1480837"/>
+              <a:gd name="connsiteX3" fmla="*/ 2835357 w 2835357"/>
+              <a:gd name="connsiteY3" fmla="*/ 1223245 h 1480837"/>
+            </a:gdLst>
+            <a:ahLst/>
+            <a:cxnLst>
+              <a:cxn ang="0">
+                <a:pos x="connsiteX0" y="connsiteY0"/>
+              </a:cxn>
+              <a:cxn ang="0">
+                <a:pos x="connsiteX1" y="connsiteY1"/>
+              </a:cxn>
+              <a:cxn ang="0">
+                <a:pos x="connsiteX2" y="connsiteY2"/>
+              </a:cxn>
+              <a:cxn ang="0">
+                <a:pos x="connsiteX3" y="connsiteY3"/>
+              </a:cxn>
+            </a:cxnLst>
+            <a:rect l="l" t="t" r="r" b="b"/>
+            <a:pathLst>
+              <a:path w="2835357" h="1480837">
+                <a:moveTo>
+                  <a:pt x="2835357" y="1480837"/>
+                </a:moveTo>
+                <a:lnTo>
+                  <a:pt x="0" y="1480837"/>
+                </a:lnTo>
+                <a:lnTo>
+                  <a:pt x="1552727" y="0"/>
+                </a:lnTo>
+                <a:lnTo>
+                  <a:pt x="2835357" y="1223245"/>
+                </a:lnTo>
+                <a:close/>
+              </a:path>
+            </a:pathLst>
+          </a:custGeom>
+          <a:solidFill>
+            <a:schemeClr val="accent4">
+              <a:alpha val="30000"/>
+            </a:schemeClr>
+          </a:solidFill>
+          <a:ln>
+            <a:noFill/>
+          </a:ln>
+        </p:spPr>
+        <p:style>
+          <a:lnRef idx="2">
+            <a:schemeClr val="accent1">
+              <a:shade val="50000"/>
+            </a:schemeClr>
+          </a:lnRef>
+          <a:fillRef idx="1">
+            <a:schemeClr val="accent1"/>
+          </a:fillRef>
+          <a:effectRef idx="0">
+            <a:schemeClr val="accent1"/>
+          </a:effectRef>
+          <a:fontRef idx="minor">
+            <a:schemeClr val="lt1"/>
+          </a:fontRef>
+        </p:style>
+        <p:txBody>
+          <a:bodyPr wrap="square" rtlCol="0" anchor="ctr">
+            <a:noAutofit/>
+          </a:bodyPr>
+          <a:lstStyle/>
+          <a:p>
+            <a:pPr algn="ctr"/>
+            <a:endParaRPr lang="en-US" dirty="0"/>
+          </a:p>
+        </p:txBody>
+      </p:sp>
+      <p:sp>
+        <p:nvSpPr>
+          <p:cNvPr id="40" name="Isosceles Triangle 39">
+            <a:extLst>
+              <a:ext uri="{FF2B5EF4-FFF2-40B4-BE49-F238E27FC236}">
+                <a16:creationId xmlns:a16="http://schemas.microsoft.com/office/drawing/2014/main" id="{FF9F2414-84E8-453E-B1F3-389FDE8192D9}"/>
+              </a:ext>
+              <a:ext uri="{C183D7F6-B498-43B3-948B-1728B52AA6E4}">
+                <adec:decorative xmlns:adec="http://schemas.microsoft.com/office/drawing/2017/decorative" val="1"/>
+              </a:ext>
+            </a:extLst>
+          </p:cNvPr>
+          <p:cNvSpPr>
+            <a:spLocks noGrp="1" noRot="1" noChangeAspect="1" noMove="1" noResize="1" noEditPoints="1" noAdjustHandles="1" noChangeArrowheads="1" noChangeShapeType="1" noTextEdit="1"/>
+          </p:cNvSpPr>
+          <p:nvPr>
+            <p:extLst>
+              <p:ext uri="{386F3935-93C4-4BCD-93E2-E3B085C9AB24}">
+                <p16:designElem xmlns:p16="http://schemas.microsoft.com/office/powerpoint/2015/main" val="1"/>
+              </p:ext>
+            </p:extLst>
+          </p:nvPr>
+        </p:nvSpPr>
+        <p:spPr>
+          <a:xfrm flipH="1">
+            <a:off x="5982258" y="4586625"/>
+            <a:ext cx="1120884" cy="556875"/>
+          </a:xfrm>
+          <a:prstGeom prst="triangle">
+            <a:avLst/>
+          </a:prstGeom>
+          <a:solidFill>
+            <a:schemeClr val="accent1">
+              <a:alpha val="30000"/>
+            </a:schemeClr>
+          </a:solidFill>
+          <a:ln>
+            <a:noFill/>
+          </a:ln>
+        </p:spPr>
+        <p:style>
+          <a:lnRef idx="2">
+            <a:schemeClr val="accent1">
+              <a:shade val="50000"/>
+            </a:schemeClr>
+          </a:lnRef>
+          <a:fillRef idx="1">
+            <a:schemeClr val="accent1"/>
+          </a:fillRef>
+          <a:effectRef idx="0">
+            <a:schemeClr val="accent1"/>
+          </a:effectRef>
+          <a:fontRef idx="minor">
+            <a:schemeClr val="lt1"/>
+          </a:fontRef>
+        </p:style>
+        <p:txBody>
+          <a:bodyPr rtlCol="0" anchor="ctr"/>
+          <a:lstStyle/>
+          <a:p>
+            <a:pPr algn="ctr"/>
+            <a:endParaRPr lang="en-US"/>
+          </a:p>
+        </p:txBody>
+      </p:sp>
       <p:pic>
         <p:nvPicPr>
-          <p:cNvPr id="4" name="Picture 3" descr="A graph with colored lines and black text&#10;&#10;AI-generated content may be incorrect.">
+          <p:cNvPr id="3" name="Picture 2" descr="A graph with colored lines and numbers&#10;&#10;AI-generated content may be incorrect.">
             <a:extLst>
               <a:ext uri="{FF2B5EF4-FFF2-40B4-BE49-F238E27FC236}">
-                <a16:creationId xmlns:a16="http://schemas.microsoft.com/office/drawing/2014/main" id="{9471A378-DF92-71DF-FD90-CFCD4CA7EEBA}"/>
+                <a16:creationId xmlns:a16="http://schemas.microsoft.com/office/drawing/2014/main" id="{D97B4097-8BC2-E108-AB53-F91DB9767CCB}"/>
               </a:ext>
             </a:extLst>
           </p:cNvPr>
@@ -6139,21 +6468,88 @@
         </p:nvPicPr>
         <p:blipFill>
           <a:blip r:embed="rId2"/>
-          <a:srcRect b="15746"/>
           <a:stretch>
             <a:fillRect/>
           </a:stretch>
         </p:blipFill>
         <p:spPr>
           <a:xfrm>
-            <a:off x="20" y="961"/>
-            <a:ext cx="9143980" cy="5142539"/>
-          </a:xfrm>
-          <a:prstGeom prst="rect">
-            <a:avLst/>
-          </a:prstGeom>
+            <a:off x="1442190" y="482600"/>
+            <a:ext cx="6259618" cy="4178299"/>
+          </a:xfrm>
+          <a:prstGeom prst="rect">
+            <a:avLst/>
+          </a:prstGeom>
+          <a:ln>
+            <a:noFill/>
+          </a:ln>
         </p:spPr>
       </p:pic>
+      <p:sp>
+        <p:nvSpPr>
+          <p:cNvPr id="42" name="Isosceles Triangle 41">
+            <a:extLst>
+              <a:ext uri="{FF2B5EF4-FFF2-40B4-BE49-F238E27FC236}">
+                <a16:creationId xmlns:a16="http://schemas.microsoft.com/office/drawing/2014/main" id="{3ECA69A1-7536-43AC-85EF-C7106179F5ED}"/>
+              </a:ext>
+              <a:ext uri="{C183D7F6-B498-43B3-948B-1728B52AA6E4}">
+                <adec:decorative xmlns:adec="http://schemas.microsoft.com/office/drawing/2017/decorative" val="1"/>
+              </a:ext>
+            </a:extLst>
+          </p:cNvPr>
+          <p:cNvSpPr>
+            <a:spLocks noGrp="1" noRot="1" noChangeAspect="1" noMove="1" noResize="1" noEditPoints="1" noAdjustHandles="1" noChangeArrowheads="1" noChangeShapeType="1" noTextEdit="1"/>
+          </p:cNvSpPr>
+          <p:nvPr>
+            <p:extLst>
+              <p:ext uri="{386F3935-93C4-4BCD-93E2-E3B085C9AB24}">
+                <p16:designElem xmlns:p16="http://schemas.microsoft.com/office/powerpoint/2015/main" val="1"/>
+              </p:ext>
+            </p:extLst>
+          </p:nvPr>
+        </p:nvSpPr>
+        <p:spPr>
+          <a:xfrm flipH="1">
+            <a:off x="5703060" y="4839857"/>
+            <a:ext cx="611177" cy="303643"/>
+          </a:xfrm>
+          <a:prstGeom prst="triangle">
+            <a:avLst/>
+          </a:prstGeom>
+          <a:solidFill>
+            <a:schemeClr val="accent1">
+              <a:alpha val="30000"/>
+            </a:schemeClr>
+          </a:solidFill>
+          <a:ln>
+            <a:noFill/>
+          </a:ln>
+        </p:spPr>
+        <p:style>
+          <a:lnRef idx="2">
+            <a:schemeClr val="accent1">
+              <a:shade val="50000"/>
+            </a:schemeClr>
+          </a:lnRef>
+          <a:fillRef idx="1">
+            <a:schemeClr val="accent1"/>
+          </a:fillRef>
+          <a:effectRef idx="0">
+            <a:schemeClr val="accent1"/>
+          </a:effectRef>
+          <a:fontRef idx="minor">
+            <a:schemeClr val="lt1"/>
+          </a:fontRef>
+        </p:style>
+        <p:txBody>
+          <a:bodyPr rtlCol="0" anchor="ctr"/>
+          <a:lstStyle/>
+          <a:p>
+            <a:pPr algn="ctr"/>
+            <a:endParaRPr lang="en-US"/>
+          </a:p>
+        </p:txBody>
+      </p:sp>
     </p:spTree>
     <p:extLst>
       <p:ext uri="{BB962C8B-B14F-4D97-AF65-F5344CB8AC3E}">
@@ -6162,7 +6558,7 @@
     </p:extLst>
   </p:cSld>
   <p:clrMapOvr>
-    <a:masterClrMapping/>
+    <a:overrideClrMapping bg1="lt1" tx1="dk1" bg2="lt2" tx2="dk2" accent1="accent1" accent2="accent2" accent3="accent3" accent4="accent4" accent5="accent5" accent6="accent6" hlink="hlink" folHlink="folHlink"/>
   </p:clrMapOvr>
 </p:sld>
 </file>
@@ -6180,7 +6576,13 @@
     </p:bg>
     <p:spTree>
       <p:nvGrpSpPr>
-        <p:cNvPr id="1" name=""/>
+        <p:cNvPr id="1" name="">
+          <a:extLst>
+            <a:ext uri="{FF2B5EF4-FFF2-40B4-BE49-F238E27FC236}">
+              <a16:creationId xmlns:a16="http://schemas.microsoft.com/office/drawing/2014/main" id="{3905F723-AB89-1874-5A46-7058EC581D38}"/>
+            </a:ext>
+          </a:extLst>
+        </p:cNvPr>
         <p:cNvGrpSpPr/>
         <p:nvPr/>
       </p:nvGrpSpPr>
@@ -6194,10 +6596,10 @@
       </p:grpSpPr>
       <p:sp>
         <p:nvSpPr>
-          <p:cNvPr id="25" name="Rectangle 24">
+          <p:cNvPr id="8" name="Rectangle 7">
             <a:extLst>
               <a:ext uri="{FF2B5EF4-FFF2-40B4-BE49-F238E27FC236}">
-                <a16:creationId xmlns:a16="http://schemas.microsoft.com/office/drawing/2014/main" id="{42A4FC2C-047E-45A5-965D-8E1E3BF09BC6}"/>
+                <a16:creationId xmlns:a16="http://schemas.microsoft.com/office/drawing/2014/main" id="{86FF76B9-219D-4469-AF87-0236D29032F1}"/>
               </a:ext>
               <a:ext uri="{C183D7F6-B498-43B3-948B-1728B52AA6E4}">
                 <adec:decorative xmlns:adec="http://schemas.microsoft.com/office/drawing/2017/decorative" val="1"/>
@@ -6215,15 +6617,17 @@
             </p:extLst>
           </p:nvPr>
         </p:nvSpPr>
-        <p:spPr bwMode="white">
-          <a:xfrm>
-            <a:off x="1143" y="0"/>
-            <a:ext cx="9141714" cy="5143500"/>
-          </a:xfrm>
-          <a:prstGeom prst="rect">
-            <a:avLst/>
-          </a:prstGeom>
-          <a:noFill/>
+        <p:spPr>
+          <a:xfrm>
+            <a:off x="0" y="0"/>
+            <a:ext cx="9144000" cy="5143500"/>
+          </a:xfrm>
+          <a:prstGeom prst="rect">
+            <a:avLst/>
+          </a:prstGeom>
+          <a:solidFill>
+            <a:schemeClr val="bg1"/>
+          </a:solidFill>
           <a:ln>
             <a:noFill/>
           </a:ln>
@@ -6246,113 +6650,360 @@
         </p:style>
         <p:txBody>
           <a:bodyPr rtlCol="0" anchor="ctr"/>
-          <a:lstStyle>
-            <a:defPPr>
-              <a:defRPr lang="en-US"/>
-            </a:defPPr>
-            <a:lvl1pPr marL="0" algn="l" defTabSz="914400" rtl="0" eaLnBrk="1" latinLnBrk="0" hangingPunct="1">
-              <a:defRPr sz="1800" kern="1200">
-                <a:solidFill>
-                  <a:schemeClr val="lt1"/>
-                </a:solidFill>
-                <a:latin typeface="+mn-lt"/>
-                <a:ea typeface="+mn-ea"/>
-                <a:cs typeface="+mn-cs"/>
-              </a:defRPr>
-            </a:lvl1pPr>
-            <a:lvl2pPr marL="457200" algn="l" defTabSz="914400" rtl="0" eaLnBrk="1" latinLnBrk="0" hangingPunct="1">
-              <a:defRPr sz="1800" kern="1200">
-                <a:solidFill>
-                  <a:schemeClr val="lt1"/>
-                </a:solidFill>
-                <a:latin typeface="+mn-lt"/>
-                <a:ea typeface="+mn-ea"/>
-                <a:cs typeface="+mn-cs"/>
-              </a:defRPr>
-            </a:lvl2pPr>
-            <a:lvl3pPr marL="914400" algn="l" defTabSz="914400" rtl="0" eaLnBrk="1" latinLnBrk="0" hangingPunct="1">
-              <a:defRPr sz="1800" kern="1200">
-                <a:solidFill>
-                  <a:schemeClr val="lt1"/>
-                </a:solidFill>
-                <a:latin typeface="+mn-lt"/>
-                <a:ea typeface="+mn-ea"/>
-                <a:cs typeface="+mn-cs"/>
-              </a:defRPr>
-            </a:lvl3pPr>
-            <a:lvl4pPr marL="1371600" algn="l" defTabSz="914400" rtl="0" eaLnBrk="1" latinLnBrk="0" hangingPunct="1">
-              <a:defRPr sz="1800" kern="1200">
-                <a:solidFill>
-                  <a:schemeClr val="lt1"/>
-                </a:solidFill>
-                <a:latin typeface="+mn-lt"/>
-                <a:ea typeface="+mn-ea"/>
-                <a:cs typeface="+mn-cs"/>
-              </a:defRPr>
-            </a:lvl4pPr>
-            <a:lvl5pPr marL="1828800" algn="l" defTabSz="914400" rtl="0" eaLnBrk="1" latinLnBrk="0" hangingPunct="1">
-              <a:defRPr sz="1800" kern="1200">
-                <a:solidFill>
-                  <a:schemeClr val="lt1"/>
-                </a:solidFill>
-                <a:latin typeface="+mn-lt"/>
-                <a:ea typeface="+mn-ea"/>
-                <a:cs typeface="+mn-cs"/>
-              </a:defRPr>
-            </a:lvl5pPr>
-            <a:lvl6pPr marL="2286000" algn="l" defTabSz="914400" rtl="0" eaLnBrk="1" latinLnBrk="0" hangingPunct="1">
-              <a:defRPr sz="1800" kern="1200">
-                <a:solidFill>
-                  <a:schemeClr val="lt1"/>
-                </a:solidFill>
-                <a:latin typeface="+mn-lt"/>
-                <a:ea typeface="+mn-ea"/>
-                <a:cs typeface="+mn-cs"/>
-              </a:defRPr>
-            </a:lvl6pPr>
-            <a:lvl7pPr marL="2743200" algn="l" defTabSz="914400" rtl="0" eaLnBrk="1" latinLnBrk="0" hangingPunct="1">
-              <a:defRPr sz="1800" kern="1200">
-                <a:solidFill>
-                  <a:schemeClr val="lt1"/>
-                </a:solidFill>
-                <a:latin typeface="+mn-lt"/>
-                <a:ea typeface="+mn-ea"/>
-                <a:cs typeface="+mn-cs"/>
-              </a:defRPr>
-            </a:lvl7pPr>
-            <a:lvl8pPr marL="3200400" algn="l" defTabSz="914400" rtl="0" eaLnBrk="1" latinLnBrk="0" hangingPunct="1">
-              <a:defRPr sz="1800" kern="1200">
-                <a:solidFill>
-                  <a:schemeClr val="lt1"/>
-                </a:solidFill>
-                <a:latin typeface="+mn-lt"/>
-                <a:ea typeface="+mn-ea"/>
-                <a:cs typeface="+mn-cs"/>
-              </a:defRPr>
-            </a:lvl8pPr>
-            <a:lvl9pPr marL="3657600" algn="l" defTabSz="914400" rtl="0" eaLnBrk="1" latinLnBrk="0" hangingPunct="1">
-              <a:defRPr sz="1800" kern="1200">
-                <a:solidFill>
-                  <a:schemeClr val="lt1"/>
-                </a:solidFill>
-                <a:latin typeface="+mn-lt"/>
-                <a:ea typeface="+mn-ea"/>
-                <a:cs typeface="+mn-cs"/>
-              </a:defRPr>
-            </a:lvl9pPr>
-          </a:lstStyle>
+          <a:lstStyle/>
+          <a:p>
+            <a:pPr algn="ctr"/>
+            <a:endParaRPr lang="en-US" dirty="0"/>
+          </a:p>
+        </p:txBody>
+      </p:sp>
+      <p:grpSp>
+        <p:nvGrpSpPr>
+          <p:cNvPr id="10" name="Group 9">
+            <a:extLst>
+              <a:ext uri="{FF2B5EF4-FFF2-40B4-BE49-F238E27FC236}">
+                <a16:creationId xmlns:a16="http://schemas.microsoft.com/office/drawing/2014/main" id="{DB88BD78-87E1-424D-B479-C37D8E41B12E}"/>
+              </a:ext>
+              <a:ext uri="{C183D7F6-B498-43B3-948B-1728B52AA6E4}">
+                <adec:decorative xmlns:adec="http://schemas.microsoft.com/office/drawing/2017/decorative" val="1"/>
+              </a:ext>
+            </a:extLst>
+          </p:cNvPr>
+          <p:cNvGrpSpPr>
+            <a:grpSpLocks noGrp="1" noUngrp="1" noRot="1" noChangeAspect="1" noMove="1" noResize="1"/>
+          </p:cNvGrpSpPr>
+          <p:nvPr>
+            <p:extLst>
+              <p:ext uri="{386F3935-93C4-4BCD-93E2-E3B085C9AB24}">
+                <p16:designElem xmlns:p16="http://schemas.microsoft.com/office/powerpoint/2015/main" val="1"/>
+              </p:ext>
+            </p:extLst>
+          </p:nvPr>
+        </p:nvGrpSpPr>
+        <p:grpSpPr>
+          <a:xfrm flipH="1">
+            <a:off x="8223477" y="1768"/>
+            <a:ext cx="1407490" cy="1324506"/>
+            <a:chOff x="-648769" y="2358"/>
+            <a:chExt cx="1876653" cy="1766008"/>
+          </a:xfrm>
+        </p:grpSpPr>
+        <p:sp>
+          <p:nvSpPr>
+            <p:cNvPr id="11" name="Freeform: Shape 10">
+              <a:extLst>
+                <a:ext uri="{FF2B5EF4-FFF2-40B4-BE49-F238E27FC236}">
+                  <a16:creationId xmlns:a16="http://schemas.microsoft.com/office/drawing/2014/main" id="{C05EB894-9410-4B20-95E4-7A25101AB895}"/>
+                </a:ext>
+                <a:ext uri="{C183D7F6-B498-43B3-948B-1728B52AA6E4}">
+                  <adec:decorative xmlns:adec="http://schemas.microsoft.com/office/drawing/2017/decorative" val="1"/>
+                </a:ext>
+              </a:extLst>
+            </p:cNvPr>
+            <p:cNvSpPr/>
+            <p:nvPr>
+              <p:extLst>
+                <p:ext uri="{386F3935-93C4-4BCD-93E2-E3B085C9AB24}">
+                  <p16:designElem xmlns:p16="http://schemas.microsoft.com/office/powerpoint/2015/main" val="1"/>
+                </p:ext>
+              </p:extLst>
+            </p:nvPr>
+          </p:nvSpPr>
+          <p:spPr>
+            <a:xfrm rot="2700000">
+              <a:off x="-415188" y="-231223"/>
+              <a:ext cx="1409491" cy="1876653"/>
+            </a:xfrm>
+            <a:custGeom>
+              <a:avLst/>
+              <a:gdLst>
+                <a:gd name="connsiteX0" fmla="*/ 0 w 1409491"/>
+                <a:gd name="connsiteY0" fmla="*/ 643075 h 1876653"/>
+                <a:gd name="connsiteX1" fmla="*/ 643075 w 1409491"/>
+                <a:gd name="connsiteY1" fmla="*/ 0 h 1876653"/>
+                <a:gd name="connsiteX2" fmla="*/ 1409491 w 1409491"/>
+                <a:gd name="connsiteY2" fmla="*/ 0 h 1876653"/>
+                <a:gd name="connsiteX3" fmla="*/ 1409491 w 1409491"/>
+                <a:gd name="connsiteY3" fmla="*/ 1876653 h 1876653"/>
+                <a:gd name="connsiteX4" fmla="*/ 1233578 w 1409491"/>
+                <a:gd name="connsiteY4" fmla="*/ 1876653 h 1876653"/>
+              </a:gdLst>
+              <a:ahLst/>
+              <a:cxnLst>
+                <a:cxn ang="0">
+                  <a:pos x="connsiteX0" y="connsiteY0"/>
+                </a:cxn>
+                <a:cxn ang="0">
+                  <a:pos x="connsiteX1" y="connsiteY1"/>
+                </a:cxn>
+                <a:cxn ang="0">
+                  <a:pos x="connsiteX2" y="connsiteY2"/>
+                </a:cxn>
+                <a:cxn ang="0">
+                  <a:pos x="connsiteX3" y="connsiteY3"/>
+                </a:cxn>
+                <a:cxn ang="0">
+                  <a:pos x="connsiteX4" y="connsiteY4"/>
+                </a:cxn>
+              </a:cxnLst>
+              <a:rect l="l" t="t" r="r" b="b"/>
+              <a:pathLst>
+                <a:path w="1409491" h="1876653">
+                  <a:moveTo>
+                    <a:pt x="0" y="643075"/>
+                  </a:moveTo>
+                  <a:lnTo>
+                    <a:pt x="643075" y="0"/>
+                  </a:lnTo>
+                  <a:lnTo>
+                    <a:pt x="1409491" y="0"/>
+                  </a:lnTo>
+                  <a:lnTo>
+                    <a:pt x="1409491" y="1876653"/>
+                  </a:lnTo>
+                  <a:lnTo>
+                    <a:pt x="1233578" y="1876653"/>
+                  </a:lnTo>
+                  <a:close/>
+                </a:path>
+              </a:pathLst>
+            </a:custGeom>
+            <a:solidFill>
+              <a:schemeClr val="accent1">
+                <a:alpha val="30000"/>
+              </a:schemeClr>
+            </a:solidFill>
+            <a:ln>
+              <a:noFill/>
+            </a:ln>
+          </p:spPr>
+          <p:style>
+            <a:lnRef idx="2">
+              <a:schemeClr val="accent1">
+                <a:shade val="50000"/>
+              </a:schemeClr>
+            </a:lnRef>
+            <a:fillRef idx="1">
+              <a:schemeClr val="accent1"/>
+            </a:fillRef>
+            <a:effectRef idx="0">
+              <a:schemeClr val="accent1"/>
+            </a:effectRef>
+            <a:fontRef idx="minor">
+              <a:schemeClr val="lt1"/>
+            </a:fontRef>
+          </p:style>
+          <p:txBody>
+            <a:bodyPr rtlCol="0" anchor="ctr"/>
+            <a:lstStyle/>
+            <a:p>
+              <a:pPr algn="ctr"/>
+              <a:endParaRPr lang="en-US"/>
+            </a:p>
+          </p:txBody>
+        </p:sp>
+        <p:sp>
+          <p:nvSpPr>
+            <p:cNvPr id="12" name="Rectangle 11">
+              <a:extLst>
+                <a:ext uri="{FF2B5EF4-FFF2-40B4-BE49-F238E27FC236}">
+                  <a16:creationId xmlns:a16="http://schemas.microsoft.com/office/drawing/2014/main" id="{166E38B6-B050-4340-8E8F-3A971DADC031}"/>
+                </a:ext>
+                <a:ext uri="{C183D7F6-B498-43B3-948B-1728B52AA6E4}">
+                  <adec:decorative xmlns:adec="http://schemas.microsoft.com/office/drawing/2017/decorative" val="1"/>
+                </a:ext>
+              </a:extLst>
+            </p:cNvPr>
+            <p:cNvSpPr/>
+            <p:nvPr>
+              <p:extLst>
+                <p:ext uri="{386F3935-93C4-4BCD-93E2-E3B085C9AB24}">
+                  <p16:designElem xmlns:p16="http://schemas.microsoft.com/office/powerpoint/2015/main" val="1"/>
+                </p:ext>
+              </p:extLst>
+            </p:nvPr>
+          </p:nvSpPr>
+          <p:spPr>
+            <a:xfrm rot="2700000">
+              <a:off x="301285" y="1282788"/>
+              <a:ext cx="485578" cy="485578"/>
+            </a:xfrm>
+            <a:prstGeom prst="rect">
+              <a:avLst/>
+            </a:prstGeom>
+            <a:solidFill>
+              <a:schemeClr val="accent1">
+                <a:alpha val="30000"/>
+              </a:schemeClr>
+            </a:solidFill>
+            <a:ln>
+              <a:noFill/>
+            </a:ln>
+          </p:spPr>
+          <p:style>
+            <a:lnRef idx="2">
+              <a:schemeClr val="accent1">
+                <a:shade val="50000"/>
+              </a:schemeClr>
+            </a:lnRef>
+            <a:fillRef idx="1">
+              <a:schemeClr val="accent1"/>
+            </a:fillRef>
+            <a:effectRef idx="0">
+              <a:schemeClr val="accent1"/>
+            </a:effectRef>
+            <a:fontRef idx="minor">
+              <a:schemeClr val="lt1"/>
+            </a:fontRef>
+          </p:style>
+          <p:txBody>
+            <a:bodyPr rtlCol="0" anchor="ctr"/>
+            <a:lstStyle/>
+            <a:p>
+              <a:pPr algn="ctr"/>
+              <a:endParaRPr lang="en-US"/>
+            </a:p>
+          </p:txBody>
+        </p:sp>
+      </p:grpSp>
+      <p:sp>
+        <p:nvSpPr>
+          <p:cNvPr id="14" name="Rectangle 13">
+            <a:extLst>
+              <a:ext uri="{FF2B5EF4-FFF2-40B4-BE49-F238E27FC236}">
+                <a16:creationId xmlns:a16="http://schemas.microsoft.com/office/drawing/2014/main" id="{2E80C965-DB6D-4F81-9E9E-B027384D0BD6}"/>
+              </a:ext>
+              <a:ext uri="{C183D7F6-B498-43B3-948B-1728B52AA6E4}">
+                <adec:decorative xmlns:adec="http://schemas.microsoft.com/office/drawing/2017/decorative" val="1"/>
+              </a:ext>
+            </a:extLst>
+          </p:cNvPr>
+          <p:cNvSpPr>
+            <a:spLocks noGrp="1" noRot="1" noChangeAspect="1" noMove="1" noResize="1" noEditPoints="1" noAdjustHandles="1" noChangeArrowheads="1" noChangeShapeType="1" noTextEdit="1"/>
+          </p:cNvSpPr>
+          <p:nvPr>
+            <p:extLst>
+              <p:ext uri="{386F3935-93C4-4BCD-93E2-E3B085C9AB24}">
+                <p16:designElem xmlns:p16="http://schemas.microsoft.com/office/powerpoint/2015/main" val="1"/>
+              </p:ext>
+            </p:extLst>
+          </p:nvPr>
+        </p:nvSpPr>
+        <p:spPr>
+          <a:xfrm rot="2700000">
+            <a:off x="2052897" y="4525250"/>
+            <a:ext cx="484026" cy="484026"/>
+          </a:xfrm>
+          <a:prstGeom prst="rect">
+            <a:avLst/>
+          </a:prstGeom>
+          <a:solidFill>
+            <a:schemeClr val="accent4">
+              <a:alpha val="30000"/>
+            </a:schemeClr>
+          </a:solidFill>
+          <a:ln>
+            <a:noFill/>
+          </a:ln>
+        </p:spPr>
+        <p:style>
+          <a:lnRef idx="2">
+            <a:schemeClr val="accent1">
+              <a:shade val="50000"/>
+            </a:schemeClr>
+          </a:lnRef>
+          <a:fillRef idx="1">
+            <a:schemeClr val="accent1"/>
+          </a:fillRef>
+          <a:effectRef idx="0">
+            <a:schemeClr val="accent1"/>
+          </a:effectRef>
+          <a:fontRef idx="minor">
+            <a:schemeClr val="lt1"/>
+          </a:fontRef>
+        </p:style>
+        <p:txBody>
+          <a:bodyPr rtlCol="0" anchor="ctr"/>
+          <a:lstStyle/>
           <a:p>
             <a:pPr algn="ctr"/>
             <a:endParaRPr lang="en-US"/>
           </a:p>
         </p:txBody>
       </p:sp>
+      <p:sp>
+        <p:nvSpPr>
+          <p:cNvPr id="16" name="Isosceles Triangle 15">
+            <a:extLst>
+              <a:ext uri="{FF2B5EF4-FFF2-40B4-BE49-F238E27FC236}">
+                <a16:creationId xmlns:a16="http://schemas.microsoft.com/office/drawing/2014/main" id="{633C5E46-DAC5-4661-9C87-22B08E2A512F}"/>
+              </a:ext>
+              <a:ext uri="{C183D7F6-B498-43B3-948B-1728B52AA6E4}">
+                <adec:decorative xmlns:adec="http://schemas.microsoft.com/office/drawing/2017/decorative" val="1"/>
+              </a:ext>
+            </a:extLst>
+          </p:cNvPr>
+          <p:cNvSpPr>
+            <a:spLocks noGrp="1" noRot="1" noChangeAspect="1" noMove="1" noResize="1" noEditPoints="1" noAdjustHandles="1" noChangeArrowheads="1" noChangeShapeType="1" noTextEdit="1"/>
+          </p:cNvSpPr>
+          <p:nvPr>
+            <p:extLst>
+              <p:ext uri="{386F3935-93C4-4BCD-93E2-E3B085C9AB24}">
+                <p16:designElem xmlns:p16="http://schemas.microsoft.com/office/powerpoint/2015/main" val="1"/>
+              </p:ext>
+            </p:extLst>
+          </p:nvPr>
+        </p:nvSpPr>
+        <p:spPr>
+          <a:xfrm>
+            <a:off x="1007577" y="4290831"/>
+            <a:ext cx="1696473" cy="852668"/>
+          </a:xfrm>
+          <a:prstGeom prst="triangle">
+            <a:avLst>
+              <a:gd name="adj" fmla="val 50000"/>
+            </a:avLst>
+          </a:prstGeom>
+          <a:solidFill>
+            <a:schemeClr val="accent4">
+              <a:alpha val="30000"/>
+            </a:schemeClr>
+          </a:solidFill>
+          <a:ln>
+            <a:noFill/>
+          </a:ln>
+        </p:spPr>
+        <p:style>
+          <a:lnRef idx="2">
+            <a:schemeClr val="accent1">
+              <a:shade val="50000"/>
+            </a:schemeClr>
+          </a:lnRef>
+          <a:fillRef idx="1">
+            <a:schemeClr val="accent1"/>
+          </a:fillRef>
+          <a:effectRef idx="0">
+            <a:schemeClr val="accent1"/>
+          </a:effectRef>
+          <a:fontRef idx="minor">
+            <a:schemeClr val="lt1"/>
+          </a:fontRef>
+        </p:style>
+        <p:txBody>
+          <a:bodyPr rtlCol="0" anchor="ctr"/>
+          <a:lstStyle/>
+          <a:p>
+            <a:pPr algn="ctr"/>
+            <a:endParaRPr lang="en-US"/>
+          </a:p>
+        </p:txBody>
+      </p:sp>
       <p:pic>
         <p:nvPicPr>
-          <p:cNvPr id="4" name="Picture 3" descr="A graph with colored lines and numbers&#10;&#10;AI-generated content may be incorrect.">
+          <p:cNvPr id="3" name="Picture 2" descr="A graph with colored lines and black text&#10;&#10;AI-generated content may be incorrect.">
             <a:extLst>
               <a:ext uri="{FF2B5EF4-FFF2-40B4-BE49-F238E27FC236}">
-                <a16:creationId xmlns:a16="http://schemas.microsoft.com/office/drawing/2014/main" id="{2DF8701B-DBED-A40A-8254-FAEFC63952A6}"/>
+                <a16:creationId xmlns:a16="http://schemas.microsoft.com/office/drawing/2014/main" id="{E1966A19-B860-9CAD-5D24-3DB5426AEFF7}"/>
               </a:ext>
             </a:extLst>
           </p:cNvPr>
@@ -6363,30 +7014,32 @@
         </p:nvPicPr>
         <p:blipFill>
           <a:blip r:embed="rId2"/>
-          <a:srcRect b="15746"/>
           <a:stretch>
             <a:fillRect/>
           </a:stretch>
         </p:blipFill>
         <p:spPr>
           <a:xfrm>
-            <a:off x="20" y="961"/>
-            <a:ext cx="9143980" cy="5142539"/>
-          </a:xfrm>
-          <a:prstGeom prst="rect">
-            <a:avLst/>
-          </a:prstGeom>
+            <a:off x="1442190" y="482600"/>
+            <a:ext cx="6259618" cy="4178299"/>
+          </a:xfrm>
+          <a:prstGeom prst="rect">
+            <a:avLst/>
+          </a:prstGeom>
+          <a:ln>
+            <a:noFill/>
+          </a:ln>
         </p:spPr>
       </p:pic>
     </p:spTree>
     <p:extLst>
       <p:ext uri="{BB962C8B-B14F-4D97-AF65-F5344CB8AC3E}">
-        <p14:creationId xmlns:p14="http://schemas.microsoft.com/office/powerpoint/2010/main" val="1914430674"/>
+        <p14:creationId xmlns:p14="http://schemas.microsoft.com/office/powerpoint/2010/main" val="1301067296"/>
       </p:ext>
     </p:extLst>
   </p:cSld>
   <p:clrMapOvr>
-    <a:masterClrMapping/>
+    <a:overrideClrMapping bg1="lt1" tx1="dk1" bg2="lt2" tx2="dk2" accent1="accent1" accent2="accent2" accent3="accent3" accent4="accent4" accent5="accent5" accent6="accent6" hlink="hlink" folHlink="folHlink"/>
   </p:clrMapOvr>
 </p:sld>
 </file>

--- a/Invasive_Mechanical_Ventilation_restyled.pptx
+++ b/Invasive_Mechanical_Ventilation_restyled.pptx
@@ -23273,11 +23273,17 @@
           <p:cNvGraphicFramePr>
             <a:graphicFrameLocks noGrp="1"/>
           </p:cNvGraphicFramePr>
-          <p:nvPr/>
+          <p:nvPr>
+            <p:extLst>
+              <p:ext uri="{D42A27DB-BD31-4B8C-83A1-F6EECF244321}">
+                <p14:modId xmlns:p14="http://schemas.microsoft.com/office/powerpoint/2010/main" val="742282784"/>
+              </p:ext>
+            </p:extLst>
+          </p:nvPr>
         </p:nvGraphicFramePr>
         <p:xfrm>
-          <a:off x="441190" y="1693597"/>
-          <a:ext cx="6012981" cy="2227295"/>
+          <a:off x="441188" y="1631584"/>
+          <a:ext cx="6012981" cy="2680680"/>
         </p:xfrm>
         <a:graphic>
           <a:graphicData uri="http://schemas.openxmlformats.org/drawingml/2006/table">
@@ -23313,7 +23319,7 @@
                   </a:extLst>
                 </a:gridCol>
               </a:tblGrid>
-              <a:tr h="318185">
+              <a:tr h="335085">
                 <a:tc>
                   <a:txBody>
                     <a:bodyPr/>
@@ -23488,7 +23494,7 @@
                   </a:ext>
                 </a:extLst>
               </a:tr>
-              <a:tr h="318185">
+              <a:tr h="335085">
                 <a:tc>
                   <a:txBody>
                     <a:bodyPr/>
@@ -23686,7 +23692,7 @@
                   </a:ext>
                 </a:extLst>
               </a:tr>
-              <a:tr h="318185">
+              <a:tr h="335085">
                 <a:tc>
                   <a:txBody>
                     <a:bodyPr/>
@@ -23908,7 +23914,7 @@
                   </a:ext>
                 </a:extLst>
               </a:tr>
-              <a:tr h="318185">
+              <a:tr h="335085">
                 <a:tc>
                   <a:txBody>
                     <a:bodyPr/>
@@ -24130,7 +24136,229 @@
                   </a:ext>
                 </a:extLst>
               </a:tr>
-              <a:tr h="318185">
+              <a:tr h="335085">
+                <a:tc>
+                  <a:txBody>
+                    <a:bodyPr/>
+                    <a:lstStyle/>
+                    <a:p>
+                      <a:r>
+                        <a:rPr lang="en-US" sz="800" b="1" u="none" dirty="0">
+                          <a:solidFill>
+                            <a:srgbClr val="1A1A2E"/>
+                          </a:solidFill>
+                          <a:latin typeface="微软雅黑" pitchFamily="34" charset="0"/>
+                          <a:ea typeface="微软雅黑" pitchFamily="34" charset="-122"/>
+                          <a:cs typeface="微软雅黑" pitchFamily="34" charset="-120"/>
+                        </a:rPr>
+                        <a:t>GCS Score (median)</a:t>
+                      </a:r>
+                      <a:endParaRPr lang="en-US" sz="800" dirty="0">
+                        <a:latin typeface="微软雅黑" charset="0"/>
+                        <a:ea typeface="微软雅黑" charset="0"/>
+                        <a:cs typeface="微软雅黑" charset="0"/>
+                      </a:endParaRPr>
+                    </a:p>
+                  </a:txBody>
+                  <a:tcPr marL="85391" marR="85391" marT="85391" marB="85391" anchor="ctr">
+                    <a:lnL w="0" cap="flat" cmpd="sng" algn="ctr">
+                      <a:noFill/>
+                    </a:lnL>
+                    <a:lnR w="0" cap="flat" cmpd="sng" algn="ctr">
+                      <a:noFill/>
+                    </a:lnR>
+                    <a:lnT w="12700" cap="flat" cmpd="sng" algn="ctr">
+                      <a:solidFill>
+                        <a:srgbClr val="000000"/>
+                      </a:solidFill>
+                      <a:prstDash val="solid"/>
+                      <a:round/>
+                      <a:headEnd type="none" w="med" len="med"/>
+                      <a:tailEnd type="none" w="med" len="med"/>
+                    </a:lnT>
+                    <a:lnB w="12700" cap="flat" cmpd="sng" algn="ctr">
+                      <a:solidFill>
+                        <a:srgbClr val="000000"/>
+                      </a:solidFill>
+                      <a:prstDash val="solid"/>
+                      <a:round/>
+                      <a:headEnd type="none" w="med" len="med"/>
+                      <a:tailEnd type="none" w="med" len="med"/>
+                    </a:lnB>
+                    <a:solidFill>
+                      <a:srgbClr val="FFFFFF"/>
+                    </a:solidFill>
+                  </a:tcPr>
+                </a:tc>
+                <a:tc>
+                  <a:txBody>
+                    <a:bodyPr/>
+                    <a:lstStyle/>
+                    <a:p>
+                      <a:pPr algn="ctr"/>
+                      <a:r>
+                        <a:rPr lang="en-US" sz="800" u="none" dirty="0">
+                          <a:solidFill>
+                            <a:srgbClr val="1A1A2E"/>
+                          </a:solidFill>
+                          <a:latin typeface="微软雅黑" pitchFamily="34" charset="0"/>
+                          <a:ea typeface="微软雅黑" pitchFamily="34" charset="-122"/>
+                          <a:cs typeface="微软雅黑" charset="0"/>
+                        </a:rPr>
+                        <a:t>15</a:t>
+                      </a:r>
+                      <a:endParaRPr lang="en-US" sz="800" dirty="0">
+                        <a:latin typeface="微软雅黑" charset="0"/>
+                        <a:ea typeface="微软雅黑" charset="0"/>
+                        <a:cs typeface="微软雅黑" charset="0"/>
+                      </a:endParaRPr>
+                    </a:p>
+                  </a:txBody>
+                  <a:tcPr marL="85391" marR="85391" marT="85391" marB="85391" anchor="ctr">
+                    <a:lnL w="0" cap="flat" cmpd="sng" algn="ctr">
+                      <a:noFill/>
+                    </a:lnL>
+                    <a:lnR w="0" cap="flat" cmpd="sng" algn="ctr">
+                      <a:noFill/>
+                    </a:lnR>
+                    <a:lnT w="12700" cap="flat" cmpd="sng" algn="ctr">
+                      <a:solidFill>
+                        <a:srgbClr val="000000"/>
+                      </a:solidFill>
+                      <a:prstDash val="solid"/>
+                      <a:round/>
+                      <a:headEnd type="none" w="med" len="med"/>
+                      <a:tailEnd type="none" w="med" len="med"/>
+                    </a:lnT>
+                    <a:lnB w="12700" cap="flat" cmpd="sng" algn="ctr">
+                      <a:solidFill>
+                        <a:srgbClr val="000000"/>
+                      </a:solidFill>
+                      <a:prstDash val="solid"/>
+                      <a:round/>
+                      <a:headEnd type="none" w="med" len="med"/>
+                      <a:tailEnd type="none" w="med" len="med"/>
+                    </a:lnB>
+                    <a:solidFill>
+                      <a:srgbClr val="FFFFFF"/>
+                    </a:solidFill>
+                  </a:tcPr>
+                </a:tc>
+                <a:tc>
+                  <a:txBody>
+                    <a:bodyPr/>
+                    <a:lstStyle/>
+                    <a:p>
+                      <a:pPr algn="ctr"/>
+                      <a:r>
+                        <a:rPr lang="en-US" sz="800" u="none" dirty="0">
+                          <a:solidFill>
+                            <a:srgbClr val="1A1A2E"/>
+                          </a:solidFill>
+                          <a:latin typeface="微软雅黑" pitchFamily="34" charset="0"/>
+                          <a:ea typeface="微软雅黑" pitchFamily="34" charset="-122"/>
+                          <a:cs typeface="微软雅黑" charset="0"/>
+                        </a:rPr>
+                        <a:t>15</a:t>
+                      </a:r>
+                      <a:endParaRPr lang="en-US" sz="800" dirty="0">
+                        <a:latin typeface="微软雅黑" charset="0"/>
+                        <a:ea typeface="微软雅黑" charset="0"/>
+                        <a:cs typeface="微软雅黑" charset="0"/>
+                      </a:endParaRPr>
+                    </a:p>
+                  </a:txBody>
+                  <a:tcPr marL="85391" marR="85391" marT="85391" marB="85391" anchor="ctr">
+                    <a:lnL w="0" cap="flat" cmpd="sng" algn="ctr">
+                      <a:noFill/>
+                    </a:lnL>
+                    <a:lnR w="0" cap="flat" cmpd="sng" algn="ctr">
+                      <a:noFill/>
+                    </a:lnR>
+                    <a:lnT w="12700" cap="flat" cmpd="sng" algn="ctr">
+                      <a:solidFill>
+                        <a:srgbClr val="000000"/>
+                      </a:solidFill>
+                      <a:prstDash val="solid"/>
+                      <a:round/>
+                      <a:headEnd type="none" w="med" len="med"/>
+                      <a:tailEnd type="none" w="med" len="med"/>
+                    </a:lnT>
+                    <a:lnB w="12700" cap="flat" cmpd="sng" algn="ctr">
+                      <a:solidFill>
+                        <a:srgbClr val="000000"/>
+                      </a:solidFill>
+                      <a:prstDash val="solid"/>
+                      <a:round/>
+                      <a:headEnd type="none" w="med" len="med"/>
+                      <a:tailEnd type="none" w="med" len="med"/>
+                    </a:lnB>
+                    <a:solidFill>
+                      <a:srgbClr val="FFFFFF"/>
+                    </a:solidFill>
+                  </a:tcPr>
+                </a:tc>
+                <a:tc>
+                  <a:txBody>
+                    <a:bodyPr/>
+                    <a:lstStyle/>
+                    <a:p>
+                      <a:pPr algn="ctr"/>
+                      <a:r>
+                        <a:rPr lang="en-US" sz="800" u="none" dirty="0">
+                          <a:solidFill>
+                            <a:srgbClr val="1A1A2E"/>
+                          </a:solidFill>
+                          <a:latin typeface="微软雅黑" pitchFamily="34" charset="0"/>
+                          <a:ea typeface="微软雅黑" pitchFamily="34" charset="-122"/>
+                          <a:cs typeface="微软雅黑" pitchFamily="34" charset="-120"/>
+                        </a:rPr>
+                        <a:t>Similar</a:t>
+                      </a:r>
+                      <a:endParaRPr lang="en-US" sz="800" dirty="0">
+                        <a:latin typeface="微软雅黑" charset="0"/>
+                        <a:ea typeface="微软雅黑" charset="0"/>
+                        <a:cs typeface="微软雅黑" charset="0"/>
+                      </a:endParaRPr>
+                    </a:p>
+                  </a:txBody>
+                  <a:tcPr marL="85391" marR="85391" marT="85391" marB="85391" anchor="ctr">
+                    <a:lnL w="0" cap="flat" cmpd="sng" algn="ctr">
+                      <a:noFill/>
+                    </a:lnL>
+                    <a:lnR w="0" cap="flat" cmpd="sng" algn="ctr">
+                      <a:noFill/>
+                    </a:lnR>
+                    <a:lnT w="12700" cap="flat" cmpd="sng" algn="ctr">
+                      <a:solidFill>
+                        <a:srgbClr val="000000"/>
+                      </a:solidFill>
+                      <a:prstDash val="solid"/>
+                      <a:round/>
+                      <a:headEnd type="none" w="med" len="med"/>
+                      <a:tailEnd type="none" w="med" len="med"/>
+                    </a:lnT>
+                    <a:lnB w="12700" cap="flat" cmpd="sng" algn="ctr">
+                      <a:solidFill>
+                        <a:srgbClr val="000000"/>
+                      </a:solidFill>
+                      <a:prstDash val="solid"/>
+                      <a:round/>
+                      <a:headEnd type="none" w="med" len="med"/>
+                      <a:tailEnd type="none" w="med" len="med"/>
+                    </a:lnB>
+                    <a:solidFill>
+                      <a:srgbClr val="FFFFFF"/>
+                    </a:solidFill>
+                  </a:tcPr>
+                </a:tc>
+                <a:extLst>
+                  <a:ext uri="{0D108BD9-81ED-4DB2-BD59-A6C34878D82A}">
+                    <a16:rowId xmlns:a16="http://schemas.microsoft.com/office/drawing/2014/main" val="3123291450"/>
+                  </a:ext>
+                </a:extLst>
+              </a:tr>
+              <a:tr h="335085">
                 <a:tc>
                   <a:txBody>
                     <a:bodyPr/>
@@ -24352,7 +24580,7 @@
                   </a:ext>
                 </a:extLst>
               </a:tr>
-              <a:tr h="318185">
+              <a:tr h="335085">
                 <a:tc>
                   <a:txBody>
                     <a:bodyPr/>
@@ -24574,7 +24802,7 @@
                   </a:ext>
                 </a:extLst>
               </a:tr>
-              <a:tr h="318185">
+              <a:tr h="335085">
                 <a:tc>
                   <a:txBody>
                     <a:bodyPr/>
@@ -26482,215 +26710,6 @@
                 <a:cs typeface="Quattrocento Sans" pitchFamily="34" charset="-120"/>
               </a:rPr>
               <a:t>308 patients (70 later switched to IMV)</a:t>
-            </a:r>
-            <a:endParaRPr lang="en-US" sz="1200" dirty="0"/>
-          </a:p>
-        </p:txBody>
-      </p:sp>
-      <p:sp>
-        <p:nvSpPr>
-          <p:cNvPr id="34" name="Shape 31"/>
-          <p:cNvSpPr/>
-          <p:nvPr/>
-        </p:nvSpPr>
-        <p:spPr>
-          <a:xfrm>
-            <a:off x="6760100" y="4555990"/>
-            <a:ext cx="2092091" cy="583508"/>
-          </a:xfrm>
-          <a:custGeom>
-            <a:avLst/>
-            <a:gdLst/>
-            <a:ahLst/>
-            <a:cxnLst/>
-            <a:rect l="l" t="t" r="r" b="b"/>
-            <a:pathLst>
-              <a:path w="2789454" h="778011">
-                <a:moveTo>
-                  <a:pt x="75903" y="0"/>
-                </a:moveTo>
-                <a:lnTo>
-                  <a:pt x="2713551" y="0"/>
-                </a:lnTo>
-                <a:cubicBezTo>
-                  <a:pt x="2755471" y="0"/>
-                  <a:pt x="2789454" y="33983"/>
-                  <a:pt x="2789454" y="75903"/>
-                </a:cubicBezTo>
-                <a:lnTo>
-                  <a:pt x="2789454" y="702108"/>
-                </a:lnTo>
-                <a:cubicBezTo>
-                  <a:pt x="2789454" y="744028"/>
-                  <a:pt x="2755471" y="778011"/>
-                  <a:pt x="2713551" y="778011"/>
-                </a:cubicBezTo>
-                <a:lnTo>
-                  <a:pt x="75903" y="778011"/>
-                </a:lnTo>
-                <a:cubicBezTo>
-                  <a:pt x="33983" y="778011"/>
-                  <a:pt x="0" y="744028"/>
-                  <a:pt x="0" y="702108"/>
-                </a:cubicBezTo>
-                <a:lnTo>
-                  <a:pt x="0" y="75903"/>
-                </a:lnTo>
-                <a:cubicBezTo>
-                  <a:pt x="0" y="34011"/>
-                  <a:pt x="34011" y="0"/>
-                  <a:pt x="75903" y="0"/>
-                </a:cubicBezTo>
-                <a:close/>
-              </a:path>
-            </a:pathLst>
-          </a:custGeom>
-          <a:solidFill>
-            <a:srgbClr val="F8F9FA"/>
-          </a:solidFill>
-          <a:ln w="25400">
-            <a:solidFill>
-              <a:srgbClr val="C75B39"/>
-            </a:solidFill>
-            <a:prstDash val="solid"/>
-          </a:ln>
-        </p:spPr>
-        <p:txBody>
-          <a:bodyPr/>
-          <a:lstStyle/>
-          <a:p>
-            <a:endParaRPr lang="en-US" sz="1050"/>
-          </a:p>
-        </p:txBody>
-      </p:sp>
-      <p:sp>
-        <p:nvSpPr>
-          <p:cNvPr id="35" name="Shape 32"/>
-          <p:cNvSpPr/>
-          <p:nvPr/>
-        </p:nvSpPr>
-        <p:spPr>
-          <a:xfrm>
-            <a:off x="6916985" y="4701867"/>
-            <a:ext cx="113855" cy="113855"/>
-          </a:xfrm>
-          <a:custGeom>
-            <a:avLst/>
-            <a:gdLst/>
-            <a:ahLst/>
-            <a:cxnLst/>
-            <a:rect l="l" t="t" r="r" b="b"/>
-            <a:pathLst>
-              <a:path w="151807" h="151807">
-                <a:moveTo>
-                  <a:pt x="149020" y="82604"/>
-                </a:moveTo>
-                <a:cubicBezTo>
-                  <a:pt x="152726" y="78898"/>
-                  <a:pt x="152726" y="72879"/>
-                  <a:pt x="149020" y="69173"/>
-                </a:cubicBezTo>
-                <a:lnTo>
-                  <a:pt x="101580" y="21733"/>
-                </a:lnTo>
-                <a:cubicBezTo>
-                  <a:pt x="97874" y="18027"/>
-                  <a:pt x="91855" y="18027"/>
-                  <a:pt x="88149" y="21733"/>
-                </a:cubicBezTo>
-                <a:cubicBezTo>
-                  <a:pt x="84443" y="25440"/>
-                  <a:pt x="84443" y="31458"/>
-                  <a:pt x="88149" y="35165"/>
-                </a:cubicBezTo>
-                <a:lnTo>
-                  <a:pt x="119400" y="66416"/>
-                </a:lnTo>
-                <a:lnTo>
-                  <a:pt x="9488" y="66416"/>
-                </a:lnTo>
-                <a:cubicBezTo>
-                  <a:pt x="4240" y="66416"/>
-                  <a:pt x="0" y="70655"/>
-                  <a:pt x="0" y="75904"/>
-                </a:cubicBezTo>
-                <a:cubicBezTo>
-                  <a:pt x="0" y="81152"/>
-                  <a:pt x="4240" y="85391"/>
-                  <a:pt x="9488" y="85391"/>
-                </a:cubicBezTo>
-                <a:lnTo>
-                  <a:pt x="119400" y="85391"/>
-                </a:lnTo>
-                <a:lnTo>
-                  <a:pt x="88149" y="116642"/>
-                </a:lnTo>
-                <a:cubicBezTo>
-                  <a:pt x="84443" y="120349"/>
-                  <a:pt x="84443" y="126367"/>
-                  <a:pt x="88149" y="130074"/>
-                </a:cubicBezTo>
-                <a:cubicBezTo>
-                  <a:pt x="91855" y="133780"/>
-                  <a:pt x="97874" y="133780"/>
-                  <a:pt x="101580" y="130074"/>
-                </a:cubicBezTo>
-                <a:lnTo>
-                  <a:pt x="149020" y="82634"/>
-                </a:lnTo>
-                <a:close/>
-              </a:path>
-            </a:pathLst>
-          </a:custGeom>
-          <a:solidFill>
-            <a:srgbClr val="C75B39"/>
-          </a:solidFill>
-          <a:ln/>
-        </p:spPr>
-        <p:txBody>
-          <a:bodyPr/>
-          <a:lstStyle/>
-          <a:p>
-            <a:endParaRPr lang="en-US" sz="1050"/>
-          </a:p>
-        </p:txBody>
-      </p:sp>
-      <p:sp>
-        <p:nvSpPr>
-          <p:cNvPr id="36" name="Text 33"/>
-          <p:cNvSpPr/>
-          <p:nvPr/>
-        </p:nvSpPr>
-        <p:spPr>
-          <a:xfrm>
-            <a:off x="7037456" y="4676961"/>
-            <a:ext cx="1722227" cy="341566"/>
-          </a:xfrm>
-          <a:prstGeom prst="rect">
-            <a:avLst/>
-          </a:prstGeom>
-          <a:noFill/>
-          <a:ln/>
-        </p:spPr>
-        <p:txBody>
-          <a:bodyPr wrap="square" lIns="0" tIns="0" rIns="0" bIns="0" rtlCol="0" anchor="ctr"/>
-          <a:lstStyle/>
-          <a:p>
-            <a:pPr algn="ctr">
-              <a:lnSpc>
-                <a:spcPct val="130000"/>
-              </a:lnSpc>
-            </a:pPr>
-            <a:r>
-              <a:rPr lang="en-US" sz="896" b="1" dirty="0">
-                <a:solidFill>
-                  <a:srgbClr val="1E3A5F"/>
-                </a:solidFill>
-                <a:latin typeface="Quattrocento Sans" pitchFamily="34" charset="0"/>
-                <a:ea typeface="Quattrocento Sans" pitchFamily="34" charset="-122"/>
-                <a:cs typeface="Quattrocento Sans" pitchFamily="34" charset="-120"/>
-              </a:rPr>
-              <a:t>Causal adjustment applied using 18 pre-treatment covariates</a:t>
             </a:r>
             <a:endParaRPr lang="en-US" sz="1200" dirty="0"/>
           </a:p>
